--- a/Reproducibility2026.pptx
+++ b/Reproducibility2026.pptx
@@ -10160,7 +10160,7 @@
         </p:spPr>
         <p:txBody>
           <a:bodyPr>
-            <a:normAutofit/>
+            <a:normAutofit fontScale="92500"/>
           </a:bodyPr>
           <a:lstStyle/>
           <a:p>
@@ -10170,7 +10170,7 @@
                   <a:srgbClr val="FFFFFF"/>
                 </a:solidFill>
               </a:rPr>
-              <a:t>Data Science for Social Good REU</a:t>
+              <a:t>REU Site: Advancing Data Science in the Public Interest</a:t>
             </a:r>
           </a:p>
           <a:p>

--- a/Reproducibility2026.pptx
+++ b/Reproducibility2026.pptx
@@ -12829,6 +12829,18 @@
             </a:r>
             <a:endParaRPr lang="en-US" dirty="0"/>
           </a:p>
+          <a:p>
+            <a:endParaRPr lang="en-US" dirty="0"/>
+          </a:p>
+          <a:p>
+            <a:r>
+              <a:rPr lang="en-US" dirty="0">
+                <a:hlinkClick r:id="rId5"/>
+              </a:rPr>
+              <a:t>Hack your way to scientific glory</a:t>
+            </a:r>
+            <a:endParaRPr lang="en-US" dirty="0"/>
+          </a:p>
         </p:txBody>
       </p:sp>
     </p:spTree>
